--- a/apps/resources/bundled_files/6-klass-aylana-tegerek-sabak.pptx
+++ b/apps/resources/bundled_files/6-klass-aylana-tegerek-sabak.pptx
@@ -5196,7 +5196,7 @@
                 </a:solidFill>
                 <a:latin typeface="PT Sans"/>
               </a:rPr>
-              <a:t>6-класс · Математика</a:t>
+              <a:t/>
             </a:r>
           </a:p>
         </p:txBody>
@@ -5688,7 +5688,7 @@
                 </a:solidFill>
                 <a:latin typeface="PT Sans"/>
               </a:rPr>
-              <a:t>6-класс ›</a:t>
+              <a:t/>
             </a:r>
           </a:p>
           <a:p>
@@ -6637,7 +6637,7 @@
                 </a:solidFill>
                 <a:latin typeface="PT Sans"/>
               </a:rPr>
-              <a:t>6-класс ›</a:t>
+              <a:t/>
             </a:r>
           </a:p>
           <a:p>
@@ -9434,7 +9434,7 @@
                 </a:solidFill>
                 <a:latin typeface="PT Sans"/>
               </a:rPr>
-              <a:t>6-класс ›</a:t>
+              <a:t/>
             </a:r>
           </a:p>
           <a:p>
@@ -12974,7 +12974,7 @@
                 </a:solidFill>
                 <a:latin typeface="PT Sans"/>
               </a:rPr>
-              <a:t>6-класс ›</a:t>
+              <a:t/>
             </a:r>
           </a:p>
           <a:p>
@@ -14557,7 +14557,7 @@
                 </a:solidFill>
                 <a:latin typeface="PT Sans"/>
               </a:rPr>
-              <a:t>6-класс ›</a:t>
+              <a:t/>
             </a:r>
           </a:p>
           <a:p>
@@ -15386,7 +15386,7 @@
                 </a:solidFill>
                 <a:latin typeface="PT Sans"/>
               </a:rPr>
-              <a:t>6-класс ›</a:t>
+              <a:t/>
             </a:r>
           </a:p>
           <a:p>
@@ -16215,7 +16215,7 @@
                 </a:solidFill>
                 <a:latin typeface="PT Sans"/>
               </a:rPr>
-              <a:t>6-класс ›</a:t>
+              <a:t/>
             </a:r>
           </a:p>
           <a:p>
@@ -17842,7 +17842,7 @@
                 </a:solidFill>
                 <a:latin typeface="PT Sans"/>
               </a:rPr>
-              <a:t>6-класс ›</a:t>
+              <a:t/>
             </a:r>
           </a:p>
           <a:p>
@@ -18926,7 +18926,7 @@
                 </a:solidFill>
                 <a:latin typeface="PT Sans"/>
               </a:rPr>
-              <a:t>6-класс ›</a:t>
+              <a:t/>
             </a:r>
           </a:p>
           <a:p>
@@ -20456,7 +20456,7 @@
                 </a:solidFill>
                 <a:latin typeface="PT Sans"/>
               </a:rPr>
-              <a:t>6-класс ›</a:t>
+              <a:t/>
             </a:r>
           </a:p>
           <a:p>
@@ -22139,7 +22139,7 @@
                 </a:solidFill>
                 <a:latin typeface="PT Sans"/>
               </a:rPr>
-              <a:t>6-класс ›</a:t>
+              <a:t/>
             </a:r>
           </a:p>
           <a:p>
@@ -23416,7 +23416,7 @@
                 </a:solidFill>
                 <a:latin typeface="PT Sans"/>
               </a:rPr>
-              <a:t>6-класс ›</a:t>
+              <a:t/>
             </a:r>
           </a:p>
           <a:p>
@@ -24844,7 +24844,7 @@
                 </a:solidFill>
                 <a:latin typeface="PT Sans"/>
               </a:rPr>
-              <a:t>6-класс ›</a:t>
+              <a:t/>
             </a:r>
           </a:p>
           <a:p>
@@ -26300,7 +26300,7 @@
                 </a:solidFill>
                 <a:latin typeface="PT Sans"/>
               </a:rPr>
-              <a:t>6-класс ›</a:t>
+              <a:t/>
             </a:r>
           </a:p>
           <a:p>
@@ -27587,7 +27587,7 @@
                 </a:solidFill>
                 <a:latin typeface="PT Sans"/>
               </a:rPr>
-              <a:t>6-класс ›</a:t>
+              <a:t/>
             </a:r>
           </a:p>
           <a:p>
@@ -28387,7 +28387,7 @@
                 </a:solidFill>
                 <a:latin typeface="PT Sans"/>
               </a:rPr>
-              <a:t>6-класс ›</a:t>
+              <a:t/>
             </a:r>
           </a:p>
           <a:p>
@@ -29228,7 +29228,7 @@
                 </a:solidFill>
                 <a:latin typeface="PT Sans"/>
               </a:rPr>
-              <a:t>6-класс ›</a:t>
+              <a:t/>
             </a:r>
           </a:p>
           <a:p>
@@ -30177,7 +30177,7 @@
                 </a:solidFill>
                 <a:latin typeface="PT Sans"/>
               </a:rPr>
-              <a:t>6-класс ›</a:t>
+              <a:t/>
             </a:r>
           </a:p>
           <a:p>
@@ -31631,7 +31631,7 @@
                 </a:solidFill>
                 <a:latin typeface="PT Sans"/>
               </a:rPr>
-              <a:t>6-класс ›</a:t>
+              <a:t/>
             </a:r>
           </a:p>
           <a:p>
@@ -32377,7 +32377,7 @@
                 </a:solidFill>
                 <a:latin typeface="PT Sans"/>
               </a:rPr>
-              <a:t>6-класс ›</a:t>
+              <a:t/>
             </a:r>
           </a:p>
           <a:p>
@@ -33185,7 +33185,7 @@
                 </a:solidFill>
                 <a:latin typeface="PT Sans"/>
               </a:rPr>
-              <a:t>6-класс ›</a:t>
+              <a:t/>
             </a:r>
           </a:p>
           <a:p>
@@ -34376,7 +34376,7 @@
                 </a:solidFill>
                 <a:latin typeface="PT Sans"/>
               </a:rPr>
-              <a:t>6-класс ›</a:t>
+              <a:t/>
             </a:r>
           </a:p>
           <a:p>
@@ -35571,7 +35571,7 @@
                 </a:solidFill>
                 <a:latin typeface="PT Sans"/>
               </a:rPr>
-              <a:t>6-класс ›</a:t>
+              <a:t/>
             </a:r>
           </a:p>
           <a:p>
@@ -35752,7 +35752,7 @@
                 </a:solidFill>
                 <a:latin typeface="PT Sans"/>
               </a:rPr>
-              <a:t>2–3-класс</a:t>
+              <a:t/>
             </a:r>
           </a:p>
         </p:txBody>
@@ -35932,7 +35932,7 @@
                 </a:solidFill>
                 <a:latin typeface="PT Sans"/>
               </a:rPr>
-              <a:t>5-класс</a:t>
+              <a:t/>
             </a:r>
           </a:p>
         </p:txBody>
@@ -36112,7 +36112,7 @@
                 </a:solidFill>
                 <a:latin typeface="PT Sans"/>
               </a:rPr>
-              <a:t>6-класс</a:t>
+              <a:t/>
             </a:r>
           </a:p>
         </p:txBody>
@@ -36348,7 +36348,7 @@
                 </a:solidFill>
                 <a:latin typeface="PT Sans"/>
               </a:rPr>
-              <a:t>7–9-класс</a:t>
+              <a:t/>
             </a:r>
           </a:p>
         </p:txBody>
@@ -36768,7 +36768,7 @@
                 </a:solidFill>
                 <a:latin typeface="PT Sans"/>
               </a:rPr>
-              <a:t>6-класс ›</a:t>
+              <a:t/>
             </a:r>
           </a:p>
           <a:p>
@@ -37916,7 +37916,7 @@
                 </a:solidFill>
                 <a:latin typeface="PT Sans"/>
               </a:rPr>
-              <a:t>6-класс ›</a:t>
+              <a:t/>
             </a:r>
           </a:p>
           <a:p>

--- a/apps/resources/bundled_files/6-klass-aylana-tegerek-sabak.pptx
+++ b/apps/resources/bundled_files/6-klass-aylana-tegerek-sabak.pptx
@@ -1582,7 +1582,7 @@
           <a:lstStyle/>
           <a:p>
             <a:r>
-              <a:t>Ой жүгүртүү маданияты (Wenxi Lee, 2.6).</a:t>
+              <a:t>Ой жүгүртүү маданияты (Wenxi Lee, 2,6).</a:t>
             </a:r>
           </a:p>
         </p:txBody>
@@ -16605,7 +16605,7 @@
                 </a:solidFill>
                 <a:latin typeface="PT Sans"/>
               </a:rPr>
-              <a:t>Жооп 3 × dдан бир аз көп болушу керек.</a:t>
+              <a:t>Жооп 3 × ддан бир аз көп болушу керек.</a:t>
             </a:r>
           </a:p>
         </p:txBody>
